--- a/T9972_REC_Khavin_C.pptx
+++ b/T9972_REC_Khavin_C.pptx
@@ -1017,6 +1017,13 @@
           </a:solidFill>
           <a:ln/>
         </p:spPr>
+        <p:txBody>
+          <a:bodyPr/>
+          <a:lstStyle/>
+          <a:p>
+            <a:endParaRPr lang="en-IN"/>
+          </a:p>
+        </p:txBody>
       </p:sp>
       <p:sp>
         <p:nvSpPr>
@@ -1037,6 +1044,13 @@
           </a:solidFill>
           <a:ln/>
         </p:spPr>
+        <p:txBody>
+          <a:bodyPr/>
+          <a:lstStyle/>
+          <a:p>
+            <a:endParaRPr lang="en-IN"/>
+          </a:p>
+        </p:txBody>
       </p:sp>
       <p:sp>
         <p:nvSpPr>
@@ -1057,6 +1071,13 @@
           </a:solidFill>
           <a:ln/>
         </p:spPr>
+        <p:txBody>
+          <a:bodyPr/>
+          <a:lstStyle/>
+          <a:p>
+            <a:endParaRPr lang="en-IN"/>
+          </a:p>
+        </p:txBody>
       </p:sp>
       <p:sp>
         <p:nvSpPr>
@@ -1082,6 +1103,13 @@
             <a:prstDash val="solid"/>
           </a:ln>
         </p:spPr>
+        <p:txBody>
+          <a:bodyPr/>
+          <a:lstStyle/>
+          <a:p>
+            <a:endParaRPr lang="en-IN"/>
+          </a:p>
+        </p:txBody>
       </p:sp>
       <p:sp>
         <p:nvSpPr>
@@ -1107,6 +1135,13 @@
             <a:prstDash val="solid"/>
           </a:ln>
         </p:spPr>
+        <p:txBody>
+          <a:bodyPr/>
+          <a:lstStyle/>
+          <a:p>
+            <a:endParaRPr lang="en-IN"/>
+          </a:p>
+        </p:txBody>
       </p:sp>
       <p:sp>
         <p:nvSpPr>
@@ -1132,6 +1167,13 @@
             <a:prstDash val="solid"/>
           </a:ln>
         </p:spPr>
+        <p:txBody>
+          <a:bodyPr/>
+          <a:lstStyle/>
+          <a:p>
+            <a:endParaRPr lang="en-IN"/>
+          </a:p>
+        </p:txBody>
       </p:sp>
       <p:sp>
         <p:nvSpPr>
@@ -1157,6 +1199,13 @@
             <a:prstDash val="solid"/>
           </a:ln>
         </p:spPr>
+        <p:txBody>
+          <a:bodyPr/>
+          <a:lstStyle/>
+          <a:p>
+            <a:endParaRPr lang="en-IN"/>
+          </a:p>
+        </p:txBody>
       </p:sp>
       <p:sp>
         <p:nvSpPr>
@@ -1182,6 +1231,13 @@
             <a:prstDash val="solid"/>
           </a:ln>
         </p:spPr>
+        <p:txBody>
+          <a:bodyPr/>
+          <a:lstStyle/>
+          <a:p>
+            <a:endParaRPr lang="en-IN"/>
+          </a:p>
+        </p:txBody>
       </p:sp>
       <p:sp>
         <p:nvSpPr>
@@ -1207,6 +1263,13 @@
             <a:prstDash val="solid"/>
           </a:ln>
         </p:spPr>
+        <p:txBody>
+          <a:bodyPr/>
+          <a:lstStyle/>
+          <a:p>
+            <a:endParaRPr lang="en-IN"/>
+          </a:p>
+        </p:txBody>
       </p:sp>
       <p:sp>
         <p:nvSpPr>
@@ -1232,6 +1295,13 @@
             <a:prstDash val="solid"/>
           </a:ln>
         </p:spPr>
+        <p:txBody>
+          <a:bodyPr/>
+          <a:lstStyle/>
+          <a:p>
+            <a:endParaRPr lang="en-IN"/>
+          </a:p>
+        </p:txBody>
       </p:sp>
       <p:sp>
         <p:nvSpPr>
@@ -1257,6 +1327,13 @@
             <a:prstDash val="solid"/>
           </a:ln>
         </p:spPr>
+        <p:txBody>
+          <a:bodyPr/>
+          <a:lstStyle/>
+          <a:p>
+            <a:endParaRPr lang="en-IN"/>
+          </a:p>
+        </p:txBody>
       </p:sp>
       <p:sp>
         <p:nvSpPr>
@@ -1279,6 +1356,13 @@
           </a:solidFill>
           <a:ln/>
         </p:spPr>
+        <p:txBody>
+          <a:bodyPr/>
+          <a:lstStyle/>
+          <a:p>
+            <a:endParaRPr lang="en-IN"/>
+          </a:p>
+        </p:txBody>
       </p:sp>
       <p:sp>
         <p:nvSpPr>
@@ -1301,6 +1385,13 @@
           </a:solidFill>
           <a:ln/>
         </p:spPr>
+        <p:txBody>
+          <a:bodyPr/>
+          <a:lstStyle/>
+          <a:p>
+            <a:endParaRPr lang="en-IN"/>
+          </a:p>
+        </p:txBody>
       </p:sp>
       <p:sp>
         <p:nvSpPr>
@@ -1323,6 +1414,13 @@
           </a:solidFill>
           <a:ln/>
         </p:spPr>
+        <p:txBody>
+          <a:bodyPr/>
+          <a:lstStyle/>
+          <a:p>
+            <a:endParaRPr lang="en-IN"/>
+          </a:p>
+        </p:txBody>
       </p:sp>
       <p:sp>
         <p:nvSpPr>
@@ -1345,6 +1443,13 @@
           </a:solidFill>
           <a:ln/>
         </p:spPr>
+        <p:txBody>
+          <a:bodyPr/>
+          <a:lstStyle/>
+          <a:p>
+            <a:endParaRPr lang="en-IN"/>
+          </a:p>
+        </p:txBody>
       </p:sp>
       <p:sp>
         <p:nvSpPr>
@@ -1367,6 +1472,13 @@
           </a:solidFill>
           <a:ln/>
         </p:spPr>
+        <p:txBody>
+          <a:bodyPr/>
+          <a:lstStyle/>
+          <a:p>
+            <a:endParaRPr lang="en-IN"/>
+          </a:p>
+        </p:txBody>
       </p:sp>
       <p:sp>
         <p:nvSpPr>
@@ -1389,6 +1501,13 @@
           </a:solidFill>
           <a:ln/>
         </p:spPr>
+        <p:txBody>
+          <a:bodyPr/>
+          <a:lstStyle/>
+          <a:p>
+            <a:endParaRPr lang="en-IN"/>
+          </a:p>
+        </p:txBody>
       </p:sp>
       <p:sp>
         <p:nvSpPr>
@@ -1411,6 +1530,13 @@
           </a:solidFill>
           <a:ln/>
         </p:spPr>
+        <p:txBody>
+          <a:bodyPr/>
+          <a:lstStyle/>
+          <a:p>
+            <a:endParaRPr lang="en-IN"/>
+          </a:p>
+        </p:txBody>
       </p:sp>
       <p:sp>
         <p:nvSpPr>
@@ -1433,6 +1559,13 @@
           </a:solidFill>
           <a:ln/>
         </p:spPr>
+        <p:txBody>
+          <a:bodyPr/>
+          <a:lstStyle/>
+          <a:p>
+            <a:endParaRPr lang="en-IN"/>
+          </a:p>
+        </p:txBody>
       </p:sp>
       <p:sp>
         <p:nvSpPr>
@@ -1453,6 +1586,13 @@
           </a:solidFill>
           <a:ln/>
         </p:spPr>
+        <p:txBody>
+          <a:bodyPr/>
+          <a:lstStyle/>
+          <a:p>
+            <a:endParaRPr lang="en-IN"/>
+          </a:p>
+        </p:txBody>
       </p:sp>
       <p:sp>
         <p:nvSpPr>
@@ -1473,6 +1613,13 @@
           </a:solidFill>
           <a:ln/>
         </p:spPr>
+        <p:txBody>
+          <a:bodyPr/>
+          <a:lstStyle/>
+          <a:p>
+            <a:endParaRPr lang="en-IN"/>
+          </a:p>
+        </p:txBody>
       </p:sp>
       <p:sp>
         <p:nvSpPr>
@@ -1493,6 +1640,13 @@
           </a:solidFill>
           <a:ln/>
         </p:spPr>
+        <p:txBody>
+          <a:bodyPr/>
+          <a:lstStyle/>
+          <a:p>
+            <a:endParaRPr lang="en-IN"/>
+          </a:p>
+        </p:txBody>
       </p:sp>
       <p:sp>
         <p:nvSpPr>
@@ -1829,6 +1983,13 @@
           </a:solidFill>
           <a:ln/>
         </p:spPr>
+        <p:txBody>
+          <a:bodyPr/>
+          <a:lstStyle/>
+          <a:p>
+            <a:endParaRPr lang="en-IN"/>
+          </a:p>
+        </p:txBody>
       </p:sp>
       <p:sp>
         <p:nvSpPr>
@@ -1849,6 +2010,13 @@
           </a:solidFill>
           <a:ln/>
         </p:spPr>
+        <p:txBody>
+          <a:bodyPr/>
+          <a:lstStyle/>
+          <a:p>
+            <a:endParaRPr lang="en-IN"/>
+          </a:p>
+        </p:txBody>
       </p:sp>
       <p:sp>
         <p:nvSpPr>
@@ -1869,6 +2037,13 @@
           </a:solidFill>
           <a:ln/>
         </p:spPr>
+        <p:txBody>
+          <a:bodyPr/>
+          <a:lstStyle/>
+          <a:p>
+            <a:endParaRPr lang="en-IN"/>
+          </a:p>
+        </p:txBody>
       </p:sp>
       <p:sp>
         <p:nvSpPr>
@@ -1894,6 +2069,13 @@
             <a:prstDash val="solid"/>
           </a:ln>
         </p:spPr>
+        <p:txBody>
+          <a:bodyPr/>
+          <a:lstStyle/>
+          <a:p>
+            <a:endParaRPr lang="en-IN"/>
+          </a:p>
+        </p:txBody>
       </p:sp>
       <p:sp>
         <p:nvSpPr>
@@ -1919,6 +2101,13 @@
             <a:prstDash val="solid"/>
           </a:ln>
         </p:spPr>
+        <p:txBody>
+          <a:bodyPr/>
+          <a:lstStyle/>
+          <a:p>
+            <a:endParaRPr lang="en-IN"/>
+          </a:p>
+        </p:txBody>
       </p:sp>
       <p:sp>
         <p:nvSpPr>
@@ -1944,6 +2133,13 @@
             <a:prstDash val="solid"/>
           </a:ln>
         </p:spPr>
+        <p:txBody>
+          <a:bodyPr/>
+          <a:lstStyle/>
+          <a:p>
+            <a:endParaRPr lang="en-IN"/>
+          </a:p>
+        </p:txBody>
       </p:sp>
       <p:sp>
         <p:nvSpPr>
@@ -1969,6 +2165,13 @@
             <a:prstDash val="solid"/>
           </a:ln>
         </p:spPr>
+        <p:txBody>
+          <a:bodyPr/>
+          <a:lstStyle/>
+          <a:p>
+            <a:endParaRPr lang="en-IN"/>
+          </a:p>
+        </p:txBody>
       </p:sp>
       <p:sp>
         <p:nvSpPr>
@@ -1994,6 +2197,13 @@
             <a:prstDash val="solid"/>
           </a:ln>
         </p:spPr>
+        <p:txBody>
+          <a:bodyPr/>
+          <a:lstStyle/>
+          <a:p>
+            <a:endParaRPr lang="en-IN"/>
+          </a:p>
+        </p:txBody>
       </p:sp>
       <p:sp>
         <p:nvSpPr>
@@ -2019,6 +2229,13 @@
             <a:prstDash val="solid"/>
           </a:ln>
         </p:spPr>
+        <p:txBody>
+          <a:bodyPr/>
+          <a:lstStyle/>
+          <a:p>
+            <a:endParaRPr lang="en-IN"/>
+          </a:p>
+        </p:txBody>
       </p:sp>
       <p:sp>
         <p:nvSpPr>
@@ -2044,6 +2261,13 @@
             <a:prstDash val="solid"/>
           </a:ln>
         </p:spPr>
+        <p:txBody>
+          <a:bodyPr/>
+          <a:lstStyle/>
+          <a:p>
+            <a:endParaRPr lang="en-IN"/>
+          </a:p>
+        </p:txBody>
       </p:sp>
       <p:sp>
         <p:nvSpPr>
@@ -2069,6 +2293,13 @@
             <a:prstDash val="solid"/>
           </a:ln>
         </p:spPr>
+        <p:txBody>
+          <a:bodyPr/>
+          <a:lstStyle/>
+          <a:p>
+            <a:endParaRPr lang="en-IN"/>
+          </a:p>
+        </p:txBody>
       </p:sp>
       <p:sp>
         <p:nvSpPr>
@@ -2091,6 +2322,13 @@
           </a:solidFill>
           <a:ln/>
         </p:spPr>
+        <p:txBody>
+          <a:bodyPr/>
+          <a:lstStyle/>
+          <a:p>
+            <a:endParaRPr lang="en-IN"/>
+          </a:p>
+        </p:txBody>
       </p:sp>
       <p:sp>
         <p:nvSpPr>
@@ -2113,6 +2351,13 @@
           </a:solidFill>
           <a:ln/>
         </p:spPr>
+        <p:txBody>
+          <a:bodyPr/>
+          <a:lstStyle/>
+          <a:p>
+            <a:endParaRPr lang="en-IN"/>
+          </a:p>
+        </p:txBody>
       </p:sp>
       <p:sp>
         <p:nvSpPr>
@@ -2135,6 +2380,13 @@
           </a:solidFill>
           <a:ln/>
         </p:spPr>
+        <p:txBody>
+          <a:bodyPr/>
+          <a:lstStyle/>
+          <a:p>
+            <a:endParaRPr lang="en-IN"/>
+          </a:p>
+        </p:txBody>
       </p:sp>
       <p:sp>
         <p:nvSpPr>
@@ -2157,6 +2409,13 @@
           </a:solidFill>
           <a:ln/>
         </p:spPr>
+        <p:txBody>
+          <a:bodyPr/>
+          <a:lstStyle/>
+          <a:p>
+            <a:endParaRPr lang="en-IN"/>
+          </a:p>
+        </p:txBody>
       </p:sp>
       <p:sp>
         <p:nvSpPr>
@@ -2179,6 +2438,13 @@
           </a:solidFill>
           <a:ln/>
         </p:spPr>
+        <p:txBody>
+          <a:bodyPr/>
+          <a:lstStyle/>
+          <a:p>
+            <a:endParaRPr lang="en-IN"/>
+          </a:p>
+        </p:txBody>
       </p:sp>
       <p:sp>
         <p:nvSpPr>
@@ -2201,6 +2467,13 @@
           </a:solidFill>
           <a:ln/>
         </p:spPr>
+        <p:txBody>
+          <a:bodyPr/>
+          <a:lstStyle/>
+          <a:p>
+            <a:endParaRPr lang="en-IN"/>
+          </a:p>
+        </p:txBody>
       </p:sp>
       <p:sp>
         <p:nvSpPr>
@@ -2223,6 +2496,13 @@
           </a:solidFill>
           <a:ln/>
         </p:spPr>
+        <p:txBody>
+          <a:bodyPr/>
+          <a:lstStyle/>
+          <a:p>
+            <a:endParaRPr lang="en-IN"/>
+          </a:p>
+        </p:txBody>
       </p:sp>
       <p:sp>
         <p:nvSpPr>
@@ -2245,6 +2525,13 @@
           </a:solidFill>
           <a:ln/>
         </p:spPr>
+        <p:txBody>
+          <a:bodyPr/>
+          <a:lstStyle/>
+          <a:p>
+            <a:endParaRPr lang="en-IN"/>
+          </a:p>
+        </p:txBody>
       </p:sp>
       <p:sp>
         <p:nvSpPr>
@@ -2866,6 +3153,13 @@
           </a:solidFill>
           <a:ln/>
         </p:spPr>
+        <p:txBody>
+          <a:bodyPr/>
+          <a:lstStyle/>
+          <a:p>
+            <a:endParaRPr lang="en-IN"/>
+          </a:p>
+        </p:txBody>
       </p:sp>
       <p:sp>
         <p:nvSpPr>
@@ -3251,6 +3545,13 @@
           </a:solidFill>
           <a:ln/>
         </p:spPr>
+        <p:txBody>
+          <a:bodyPr/>
+          <a:lstStyle/>
+          <a:p>
+            <a:endParaRPr lang="en-IN"/>
+          </a:p>
+        </p:txBody>
       </p:sp>
       <p:sp>
         <p:nvSpPr>
@@ -3271,6 +3572,13 @@
           </a:solidFill>
           <a:ln/>
         </p:spPr>
+        <p:txBody>
+          <a:bodyPr/>
+          <a:lstStyle/>
+          <a:p>
+            <a:endParaRPr lang="en-IN"/>
+          </a:p>
+        </p:txBody>
       </p:sp>
       <p:sp>
         <p:nvSpPr>
@@ -3511,7 +3819,7 @@
                 <a:ea typeface="Calibri" pitchFamily="34" charset="-122"/>
                 <a:cs typeface="Calibri" pitchFamily="34" charset="-120"/>
               </a:rPr>
-              <a:t>L&amp;T-style purchase orders, invoices, contracts, policies, vendor lists, supplier scorecards and RFQ templates generated to avoid exposing confidential enterprise data.</a:t>
+              <a:t>Purchase orders, invoices, contracts, policies, vendor lists, supplier scorecards and RFQ templates generated to avoid exposing confidential enterprise data.</a:t>
             </a:r>
             <a:endParaRPr lang="en-US" sz="1100" dirty="0"/>
           </a:p>
@@ -4004,6 +4312,13 @@
           </a:solidFill>
           <a:ln/>
         </p:spPr>
+        <p:txBody>
+          <a:bodyPr/>
+          <a:lstStyle/>
+          <a:p>
+            <a:endParaRPr lang="en-IN"/>
+          </a:p>
+        </p:txBody>
       </p:sp>
       <p:sp>
         <p:nvSpPr>
@@ -4024,6 +4339,13 @@
           </a:solidFill>
           <a:ln/>
         </p:spPr>
+        <p:txBody>
+          <a:bodyPr/>
+          <a:lstStyle/>
+          <a:p>
+            <a:endParaRPr lang="en-IN"/>
+          </a:p>
+        </p:txBody>
       </p:sp>
       <p:sp>
         <p:nvSpPr>
@@ -4044,6 +4366,13 @@
           </a:solidFill>
           <a:ln/>
         </p:spPr>
+        <p:txBody>
+          <a:bodyPr/>
+          <a:lstStyle/>
+          <a:p>
+            <a:endParaRPr lang="en-IN"/>
+          </a:p>
+        </p:txBody>
       </p:sp>
       <p:sp>
         <p:nvSpPr>
@@ -4069,6 +4398,13 @@
             <a:prstDash val="solid"/>
           </a:ln>
         </p:spPr>
+        <p:txBody>
+          <a:bodyPr/>
+          <a:lstStyle/>
+          <a:p>
+            <a:endParaRPr lang="en-IN"/>
+          </a:p>
+        </p:txBody>
       </p:sp>
       <p:sp>
         <p:nvSpPr>
@@ -4094,6 +4430,13 @@
             <a:prstDash val="solid"/>
           </a:ln>
         </p:spPr>
+        <p:txBody>
+          <a:bodyPr/>
+          <a:lstStyle/>
+          <a:p>
+            <a:endParaRPr lang="en-IN"/>
+          </a:p>
+        </p:txBody>
       </p:sp>
       <p:sp>
         <p:nvSpPr>
@@ -4119,6 +4462,13 @@
             <a:prstDash val="solid"/>
           </a:ln>
         </p:spPr>
+        <p:txBody>
+          <a:bodyPr/>
+          <a:lstStyle/>
+          <a:p>
+            <a:endParaRPr lang="en-IN"/>
+          </a:p>
+        </p:txBody>
       </p:sp>
       <p:sp>
         <p:nvSpPr>
@@ -4144,6 +4494,13 @@
             <a:prstDash val="solid"/>
           </a:ln>
         </p:spPr>
+        <p:txBody>
+          <a:bodyPr/>
+          <a:lstStyle/>
+          <a:p>
+            <a:endParaRPr lang="en-IN"/>
+          </a:p>
+        </p:txBody>
       </p:sp>
       <p:sp>
         <p:nvSpPr>
@@ -4169,6 +4526,13 @@
             <a:prstDash val="solid"/>
           </a:ln>
         </p:spPr>
+        <p:txBody>
+          <a:bodyPr/>
+          <a:lstStyle/>
+          <a:p>
+            <a:endParaRPr lang="en-IN"/>
+          </a:p>
+        </p:txBody>
       </p:sp>
       <p:sp>
         <p:nvSpPr>
@@ -4194,6 +4558,13 @@
             <a:prstDash val="solid"/>
           </a:ln>
         </p:spPr>
+        <p:txBody>
+          <a:bodyPr/>
+          <a:lstStyle/>
+          <a:p>
+            <a:endParaRPr lang="en-IN"/>
+          </a:p>
+        </p:txBody>
       </p:sp>
       <p:sp>
         <p:nvSpPr>
@@ -4219,6 +4590,13 @@
             <a:prstDash val="solid"/>
           </a:ln>
         </p:spPr>
+        <p:txBody>
+          <a:bodyPr/>
+          <a:lstStyle/>
+          <a:p>
+            <a:endParaRPr lang="en-IN"/>
+          </a:p>
+        </p:txBody>
       </p:sp>
       <p:sp>
         <p:nvSpPr>
@@ -4244,6 +4622,13 @@
             <a:prstDash val="solid"/>
           </a:ln>
         </p:spPr>
+        <p:txBody>
+          <a:bodyPr/>
+          <a:lstStyle/>
+          <a:p>
+            <a:endParaRPr lang="en-IN"/>
+          </a:p>
+        </p:txBody>
       </p:sp>
       <p:sp>
         <p:nvSpPr>
@@ -4266,6 +4651,13 @@
           </a:solidFill>
           <a:ln/>
         </p:spPr>
+        <p:txBody>
+          <a:bodyPr/>
+          <a:lstStyle/>
+          <a:p>
+            <a:endParaRPr lang="en-IN"/>
+          </a:p>
+        </p:txBody>
       </p:sp>
       <p:sp>
         <p:nvSpPr>
@@ -4288,6 +4680,13 @@
           </a:solidFill>
           <a:ln/>
         </p:spPr>
+        <p:txBody>
+          <a:bodyPr/>
+          <a:lstStyle/>
+          <a:p>
+            <a:endParaRPr lang="en-IN"/>
+          </a:p>
+        </p:txBody>
       </p:sp>
       <p:sp>
         <p:nvSpPr>
@@ -4310,6 +4709,13 @@
           </a:solidFill>
           <a:ln/>
         </p:spPr>
+        <p:txBody>
+          <a:bodyPr/>
+          <a:lstStyle/>
+          <a:p>
+            <a:endParaRPr lang="en-IN"/>
+          </a:p>
+        </p:txBody>
       </p:sp>
       <p:sp>
         <p:nvSpPr>
@@ -4332,6 +4738,13 @@
           </a:solidFill>
           <a:ln/>
         </p:spPr>
+        <p:txBody>
+          <a:bodyPr/>
+          <a:lstStyle/>
+          <a:p>
+            <a:endParaRPr lang="en-IN"/>
+          </a:p>
+        </p:txBody>
       </p:sp>
       <p:sp>
         <p:nvSpPr>
@@ -4354,6 +4767,13 @@
           </a:solidFill>
           <a:ln/>
         </p:spPr>
+        <p:txBody>
+          <a:bodyPr/>
+          <a:lstStyle/>
+          <a:p>
+            <a:endParaRPr lang="en-IN"/>
+          </a:p>
+        </p:txBody>
       </p:sp>
       <p:sp>
         <p:nvSpPr>
@@ -4376,6 +4796,13 @@
           </a:solidFill>
           <a:ln/>
         </p:spPr>
+        <p:txBody>
+          <a:bodyPr/>
+          <a:lstStyle/>
+          <a:p>
+            <a:endParaRPr lang="en-IN"/>
+          </a:p>
+        </p:txBody>
       </p:sp>
       <p:sp>
         <p:nvSpPr>
@@ -4398,6 +4825,13 @@
           </a:solidFill>
           <a:ln/>
         </p:spPr>
+        <p:txBody>
+          <a:bodyPr/>
+          <a:lstStyle/>
+          <a:p>
+            <a:endParaRPr lang="en-IN"/>
+          </a:p>
+        </p:txBody>
       </p:sp>
       <p:sp>
         <p:nvSpPr>
@@ -4420,6 +4854,13 @@
           </a:solidFill>
           <a:ln/>
         </p:spPr>
+        <p:txBody>
+          <a:bodyPr/>
+          <a:lstStyle/>
+          <a:p>
+            <a:endParaRPr lang="en-IN"/>
+          </a:p>
+        </p:txBody>
       </p:sp>
       <p:sp>
         <p:nvSpPr>
@@ -5231,6 +5672,13 @@
           </a:solidFill>
           <a:ln/>
         </p:spPr>
+        <p:txBody>
+          <a:bodyPr/>
+          <a:lstStyle/>
+          <a:p>
+            <a:endParaRPr lang="en-IN"/>
+          </a:p>
+        </p:txBody>
       </p:sp>
       <p:sp>
         <p:nvSpPr>
@@ -5616,6 +6064,13 @@
           </a:solidFill>
           <a:ln/>
         </p:spPr>
+        <p:txBody>
+          <a:bodyPr/>
+          <a:lstStyle/>
+          <a:p>
+            <a:endParaRPr lang="en-IN"/>
+          </a:p>
+        </p:txBody>
       </p:sp>
       <p:sp>
         <p:nvSpPr>
@@ -5636,6 +6091,13 @@
           </a:solidFill>
           <a:ln/>
         </p:spPr>
+        <p:txBody>
+          <a:bodyPr/>
+          <a:lstStyle/>
+          <a:p>
+            <a:endParaRPr lang="en-IN"/>
+          </a:p>
+        </p:txBody>
       </p:sp>
       <p:sp>
         <p:nvSpPr>
